--- a/crypto_08_payment.pptx
+++ b/crypto_08_payment.pptx
@@ -692,7 +692,7 @@
           <a:p>
             <a:fld id="{EB1FAE4C-5332-014D-8E1B-BB8DA73EF81D}" type="datetimeFigureOut">
               <a:rPr lang="en-US"/>
-              <a:t>5/2/22</a:t>
+              <a:t>5/9/22</a:t>
             </a:fld>
             <a:endParaRPr lang="en-US"/>
           </a:p>
@@ -862,7 +862,7 @@
           <a:p>
             <a:fld id="{EB1FAE4C-5332-014D-8E1B-BB8DA73EF81D}" type="datetimeFigureOut">
               <a:rPr lang="en-US"/>
-              <a:t>5/2/22</a:t>
+              <a:t>5/9/22</a:t>
             </a:fld>
             <a:endParaRPr lang="en-US"/>
           </a:p>
@@ -1042,7 +1042,7 @@
           <a:p>
             <a:fld id="{EB1FAE4C-5332-014D-8E1B-BB8DA73EF81D}" type="datetimeFigureOut">
               <a:rPr lang="en-US"/>
-              <a:t>5/2/22</a:t>
+              <a:t>5/9/22</a:t>
             </a:fld>
             <a:endParaRPr lang="en-US"/>
           </a:p>
@@ -1212,7 +1212,7 @@
           <a:p>
             <a:fld id="{EB1FAE4C-5332-014D-8E1B-BB8DA73EF81D}" type="datetimeFigureOut">
               <a:rPr lang="en-US"/>
-              <a:t>5/2/22</a:t>
+              <a:t>5/9/22</a:t>
             </a:fld>
             <a:endParaRPr lang="en-US"/>
           </a:p>
@@ -1459,7 +1459,7 @@
           <a:p>
             <a:fld id="{EB1FAE4C-5332-014D-8E1B-BB8DA73EF81D}" type="datetimeFigureOut">
               <a:rPr lang="en-US"/>
-              <a:t>5/2/22</a:t>
+              <a:t>5/9/22</a:t>
             </a:fld>
             <a:endParaRPr lang="en-US"/>
           </a:p>
@@ -1690,7 +1690,7 @@
           <a:p>
             <a:fld id="{EB1FAE4C-5332-014D-8E1B-BB8DA73EF81D}" type="datetimeFigureOut">
               <a:rPr lang="en-US"/>
-              <a:t>5/2/22</a:t>
+              <a:t>5/9/22</a:t>
             </a:fld>
             <a:endParaRPr lang="en-US"/>
           </a:p>
@@ -2056,7 +2056,7 @@
           <a:p>
             <a:fld id="{EB1FAE4C-5332-014D-8E1B-BB8DA73EF81D}" type="datetimeFigureOut">
               <a:rPr lang="en-US"/>
-              <a:t>5/2/22</a:t>
+              <a:t>5/9/22</a:t>
             </a:fld>
             <a:endParaRPr lang="en-US"/>
           </a:p>
@@ -2175,7 +2175,7 @@
           <a:p>
             <a:fld id="{EB1FAE4C-5332-014D-8E1B-BB8DA73EF81D}" type="datetimeFigureOut">
               <a:rPr lang="en-US"/>
-              <a:t>5/2/22</a:t>
+              <a:t>5/9/22</a:t>
             </a:fld>
             <a:endParaRPr lang="en-US"/>
           </a:p>
@@ -2272,7 +2272,7 @@
           <a:p>
             <a:fld id="{EB1FAE4C-5332-014D-8E1B-BB8DA73EF81D}" type="datetimeFigureOut">
               <a:rPr lang="en-US"/>
-              <a:t>5/2/22</a:t>
+              <a:t>5/9/22</a:t>
             </a:fld>
             <a:endParaRPr lang="en-US"/>
           </a:p>
@@ -2548,7 +2548,7 @@
           <a:p>
             <a:fld id="{EB1FAE4C-5332-014D-8E1B-BB8DA73EF81D}" type="datetimeFigureOut">
               <a:rPr lang="en-US"/>
-              <a:t>5/2/22</a:t>
+              <a:t>5/9/22</a:t>
             </a:fld>
             <a:endParaRPr lang="en-US"/>
           </a:p>
@@ -2805,7 +2805,7 @@
           <a:p>
             <a:fld id="{EB1FAE4C-5332-014D-8E1B-BB8DA73EF81D}" type="datetimeFigureOut">
               <a:rPr lang="en-US"/>
-              <a:t>5/2/22</a:t>
+              <a:t>5/9/22</a:t>
             </a:fld>
             <a:endParaRPr lang="en-US"/>
           </a:p>
@@ -3018,7 +3018,7 @@
           <a:p>
             <a:fld id="{EB1FAE4C-5332-014D-8E1B-BB8DA73EF81D}" type="datetimeFigureOut">
               <a:rPr lang="en-US"/>
-              <a:t>5/2/22</a:t>
+              <a:t>5/9/22</a:t>
             </a:fld>
             <a:endParaRPr lang="en-US"/>
           </a:p>
